--- a/output_pptx/Amazing_Grace_My_Chains_Are_Gone.pptx
+++ b/output_pptx/Amazing_Grace_My_Chains_Are_Gone.pptx
@@ -3119,8 +3119,8 @@
         </p:nvSpPr>
         <p:spPr>
           <a:xfrm>
-            <a:off x="594360" y="2258568"/>
-            <a:ext cx="11002975" cy="685800"/>
+            <a:off x="640080" y="2052828"/>
+            <a:ext cx="10911535" cy="731520"/>
           </a:xfrm>
           <a:prstGeom prst="rect">
             <a:avLst/>
@@ -3135,7 +3135,7 @@
           <a:p>
             <a:pPr algn="ctr"/>
             <a:r>
-              <a:rPr sz="4400" b="1" i="0">
+              <a:rPr sz="4800" b="1" i="0">
                 <a:solidFill>
                   <a:srgbClr val="FFFFFF"/>
                 </a:solidFill>
@@ -3154,8 +3154,8 @@
         </p:nvSpPr>
         <p:spPr>
           <a:xfrm>
-            <a:off x="594360" y="2980944"/>
-            <a:ext cx="11002975" cy="347472"/>
+            <a:off x="640080" y="2985516"/>
+            <a:ext cx="10911535" cy="731520"/>
           </a:xfrm>
           <a:prstGeom prst="rect">
             <a:avLst/>
@@ -3170,13 +3170,13 @@
           <a:p>
             <a:pPr algn="ctr"/>
             <a:r>
-              <a:rPr sz="2200" b="0" i="1">
-                <a:solidFill>
-                  <a:srgbClr val="8C8C8C"/>
+              <a:rPr sz="4200" b="1" i="0">
+                <a:solidFill>
+                  <a:srgbClr val="FFFFFF"/>
                 </a:solidFill>
                 <a:latin typeface="Arial"/>
               </a:rPr>
-              <a:t/>
+              <a:t>Maravilhosa graça, quão doce é o som</a:t>
             </a:r>
           </a:p>
         </p:txBody>
@@ -3189,8 +3189,8 @@
         </p:nvSpPr>
         <p:spPr>
           <a:xfrm>
-            <a:off x="594360" y="3529584"/>
-            <a:ext cx="11002975" cy="685800"/>
+            <a:off x="640080" y="4128516"/>
+            <a:ext cx="10911535" cy="310896"/>
           </a:xfrm>
           <a:prstGeom prst="rect">
             <a:avLst/>
@@ -3205,13 +3205,13 @@
           <a:p>
             <a:pPr algn="ctr"/>
             <a:r>
-              <a:rPr sz="3911" b="1" i="0">
-                <a:solidFill>
-                  <a:srgbClr val="FFFFFF"/>
+              <a:rPr sz="2000" b="0" i="0">
+                <a:solidFill>
+                  <a:srgbClr val="828282"/>
                 </a:solidFill>
                 <a:latin typeface="Arial"/>
               </a:rPr>
-              <a:t>Maravilhosa graça, quão doce é o som</a:t>
+              <a:t>おどろくばかりの めぐみなりき</a:t>
             </a:r>
           </a:p>
         </p:txBody>
@@ -3224,8 +3224,8 @@
         </p:nvSpPr>
         <p:spPr>
           <a:xfrm>
-            <a:off x="594360" y="4251960"/>
-            <a:ext cx="11002975" cy="347472"/>
+            <a:off x="640080" y="4494276"/>
+            <a:ext cx="10911535" cy="310896"/>
           </a:xfrm>
           <a:prstGeom prst="rect">
             <a:avLst/>
@@ -3240,13 +3240,13 @@
           <a:p>
             <a:pPr algn="ctr"/>
             <a:r>
-              <a:rPr sz="2200" b="0" i="1">
-                <a:solidFill>
-                  <a:srgbClr val="8C8C8C"/>
+              <a:rPr sz="2000" b="0" i="0">
+                <a:solidFill>
+                  <a:srgbClr val="828282"/>
                 </a:solidFill>
                 <a:latin typeface="Arial"/>
               </a:rPr>
-              <a:t/>
+              <a:t>この身のけがれを 知れるわれに</a:t>
             </a:r>
           </a:p>
         </p:txBody>
@@ -3285,8 +3285,8 @@
         </p:nvSpPr>
         <p:spPr>
           <a:xfrm>
-            <a:off x="594360" y="1837944"/>
-            <a:ext cx="11002975" cy="685800"/>
+            <a:off x="640080" y="1650492"/>
+            <a:ext cx="10911535" cy="731520"/>
           </a:xfrm>
           <a:prstGeom prst="rect">
             <a:avLst/>
@@ -3301,7 +3301,7 @@
           <a:p>
             <a:pPr algn="ctr"/>
             <a:r>
-              <a:rPr sz="4400" b="1" i="0">
+              <a:rPr sz="4800" b="1" i="0">
                 <a:solidFill>
                   <a:srgbClr val="FFFFFF"/>
                 </a:solidFill>
@@ -3320,8 +3320,8 @@
         </p:nvSpPr>
         <p:spPr>
           <a:xfrm>
-            <a:off x="594360" y="2560320"/>
-            <a:ext cx="11002975" cy="384048"/>
+            <a:off x="640080" y="2418588"/>
+            <a:ext cx="10911535" cy="365760"/>
           </a:xfrm>
           <a:prstGeom prst="rect">
             <a:avLst/>
@@ -3338,7 +3338,7 @@
             <a:r>
               <a:rPr sz="2400" b="0" i="1">
                 <a:solidFill>
-                  <a:srgbClr val="B4B4B4"/>
+                  <a:srgbClr val="AAAAAA"/>
                 </a:solidFill>
                 <a:latin typeface="Arial"/>
               </a:rPr>
@@ -3355,8 +3355,8 @@
         </p:nvSpPr>
         <p:spPr>
           <a:xfrm>
-            <a:off x="594360" y="2980944"/>
-            <a:ext cx="11002975" cy="347472"/>
+            <a:off x="640080" y="2985516"/>
+            <a:ext cx="10911535" cy="731520"/>
           </a:xfrm>
           <a:prstGeom prst="rect">
             <a:avLst/>
@@ -3371,13 +3371,13 @@
           <a:p>
             <a:pPr algn="ctr"/>
             <a:r>
-              <a:rPr sz="2000" b="0" i="1">
-                <a:solidFill>
-                  <a:srgbClr val="8C8C8C"/>
+              <a:rPr sz="4800" b="1" i="0">
+                <a:solidFill>
+                  <a:srgbClr val="FFFFFF"/>
                 </a:solidFill>
                 <a:latin typeface="Arial"/>
               </a:rPr>
-              <a:t/>
+              <a:t>あわれ-み流れる  恵と   主の愛</a:t>
             </a:r>
           </a:p>
         </p:txBody>
@@ -3390,8 +3390,8 @@
         </p:nvSpPr>
         <p:spPr>
           <a:xfrm>
-            <a:off x="594360" y="3529584"/>
-            <a:ext cx="11002975" cy="685800"/>
+            <a:off x="640080" y="3753612"/>
+            <a:ext cx="10911535" cy="365760"/>
           </a:xfrm>
           <a:prstGeom prst="rect">
             <a:avLst/>
@@ -3406,13 +3406,13 @@
           <a:p>
             <a:pPr algn="ctr"/>
             <a:r>
-              <a:rPr sz="4400" b="1" i="0">
-                <a:solidFill>
-                  <a:srgbClr val="FFFFFF"/>
+              <a:rPr sz="2400" b="0" i="1">
+                <a:solidFill>
+                  <a:srgbClr val="AAAAAA"/>
                 </a:solidFill>
                 <a:latin typeface="Arial"/>
               </a:rPr>
-              <a:t>あわれ-み流れる  恵と   主の愛</a:t>
+              <a:t>aware mi nagareru megumi to shu no ai</a:t>
             </a:r>
           </a:p>
         </p:txBody>
@@ -3425,8 +3425,8 @@
         </p:nvSpPr>
         <p:spPr>
           <a:xfrm>
-            <a:off x="594360" y="4251960"/>
-            <a:ext cx="11002975" cy="384048"/>
+            <a:off x="640080" y="4530852"/>
+            <a:ext cx="10911535" cy="310896"/>
           </a:xfrm>
           <a:prstGeom prst="rect">
             <a:avLst/>
@@ -3441,13 +3441,13 @@
           <a:p>
             <a:pPr algn="ctr"/>
             <a:r>
-              <a:rPr sz="2400" b="0" i="1">
-                <a:solidFill>
-                  <a:srgbClr val="B4B4B4"/>
+              <a:rPr sz="2000" b="0" i="1">
+                <a:solidFill>
+                  <a:srgbClr val="828282"/>
                 </a:solidFill>
                 <a:latin typeface="Arial"/>
               </a:rPr>
-              <a:t>aware mi nagareru megumi to shu no ai</a:t>
+              <a:t>Na hora em que eu acreditei</a:t>
             </a:r>
           </a:p>
         </p:txBody>
@@ -3460,8 +3460,8 @@
         </p:nvSpPr>
         <p:spPr>
           <a:xfrm>
-            <a:off x="594360" y="4672584"/>
-            <a:ext cx="11002975" cy="347472"/>
+            <a:off x="640080" y="4896612"/>
+            <a:ext cx="10911535" cy="310896"/>
           </a:xfrm>
           <a:prstGeom prst="rect">
             <a:avLst/>
@@ -3478,11 +3478,11 @@
             <a:r>
               <a:rPr sz="2000" b="0" i="1">
                 <a:solidFill>
-                  <a:srgbClr val="8C8C8C"/>
+                  <a:srgbClr val="828282"/>
                 </a:solidFill>
                 <a:latin typeface="Arial"/>
               </a:rPr>
-              <a:t/>
+              <a:t>Minhas correntes se foram, eu fui liberto</a:t>
             </a:r>
           </a:p>
         </p:txBody>
@@ -3521,8 +3521,8 @@
         </p:nvSpPr>
         <p:spPr>
           <a:xfrm>
-            <a:off x="594360" y="1837944"/>
-            <a:ext cx="11002975" cy="685800"/>
+            <a:off x="640080" y="1650492"/>
+            <a:ext cx="10911535" cy="731520"/>
           </a:xfrm>
           <a:prstGeom prst="rect">
             <a:avLst/>
@@ -3537,7 +3537,7 @@
           <a:p>
             <a:pPr algn="ctr"/>
             <a:r>
-              <a:rPr sz="4400" b="1" i="0">
+              <a:rPr sz="4800" b="1" i="0">
                 <a:solidFill>
                   <a:srgbClr val="FFFFFF"/>
                 </a:solidFill>
@@ -3556,8 +3556,8 @@
         </p:nvSpPr>
         <p:spPr>
           <a:xfrm>
-            <a:off x="594360" y="2560320"/>
-            <a:ext cx="11002975" cy="384048"/>
+            <a:off x="640080" y="2418588"/>
+            <a:ext cx="10911535" cy="365760"/>
           </a:xfrm>
           <a:prstGeom prst="rect">
             <a:avLst/>
@@ -3574,7 +3574,7 @@
             <a:r>
               <a:rPr sz="2400" b="0" i="1">
                 <a:solidFill>
-                  <a:srgbClr val="B4B4B4"/>
+                  <a:srgbClr val="AAAAAA"/>
                 </a:solidFill>
                 <a:latin typeface="Arial"/>
               </a:rPr>
@@ -3591,8 +3591,8 @@
         </p:nvSpPr>
         <p:spPr>
           <a:xfrm>
-            <a:off x="594360" y="2980944"/>
-            <a:ext cx="11002975" cy="347472"/>
+            <a:off x="640080" y="2985516"/>
+            <a:ext cx="10911535" cy="731520"/>
           </a:xfrm>
           <a:prstGeom prst="rect">
             <a:avLst/>
@@ -3607,13 +3607,13 @@
           <a:p>
             <a:pPr algn="ctr"/>
             <a:r>
-              <a:rPr sz="2000" b="0" i="1">
-                <a:solidFill>
-                  <a:srgbClr val="8C8C8C"/>
+              <a:rPr sz="4800" b="1" i="0">
+                <a:solidFill>
+                  <a:srgbClr val="FFFFFF"/>
                 </a:solidFill>
                 <a:latin typeface="Arial"/>
               </a:rPr>
-              <a:t/>
+              <a:t>まかするこころを おこさせたり</a:t>
             </a:r>
           </a:p>
         </p:txBody>
@@ -3626,8 +3626,8 @@
         </p:nvSpPr>
         <p:spPr>
           <a:xfrm>
-            <a:off x="594360" y="3529584"/>
-            <a:ext cx="11002975" cy="685800"/>
+            <a:off x="640080" y="3753612"/>
+            <a:ext cx="10911535" cy="365760"/>
           </a:xfrm>
           <a:prstGeom prst="rect">
             <a:avLst/>
@@ -3642,13 +3642,13 @@
           <a:p>
             <a:pPr algn="ctr"/>
             <a:r>
-              <a:rPr sz="4400" b="1" i="0">
-                <a:solidFill>
-                  <a:srgbClr val="FFFFFF"/>
+              <a:rPr sz="2400" b="0" i="1">
+                <a:solidFill>
+                  <a:srgbClr val="AAAAAA"/>
                 </a:solidFill>
                 <a:latin typeface="Arial"/>
               </a:rPr>
-              <a:t>まかするこころを おこさせたり</a:t>
+              <a:t>makasuru kokoro wo okosasetari</a:t>
             </a:r>
           </a:p>
         </p:txBody>
@@ -3661,8 +3661,8 @@
         </p:nvSpPr>
         <p:spPr>
           <a:xfrm>
-            <a:off x="594360" y="4251960"/>
-            <a:ext cx="11002975" cy="384048"/>
+            <a:off x="640080" y="4530852"/>
+            <a:ext cx="10911535" cy="310896"/>
           </a:xfrm>
           <a:prstGeom prst="rect">
             <a:avLst/>
@@ -3677,13 +3677,13 @@
           <a:p>
             <a:pPr algn="ctr"/>
             <a:r>
-              <a:rPr sz="2400" b="0" i="1">
-                <a:solidFill>
-                  <a:srgbClr val="B4B4B4"/>
+              <a:rPr sz="2000" b="0" i="1">
+                <a:solidFill>
+                  <a:srgbClr val="828282"/>
                 </a:solidFill>
                 <a:latin typeface="Arial"/>
               </a:rPr>
-              <a:t>makasuru kokoro wo okosasetari</a:t>
+              <a:t>Era cego, mas agora eu vejo</a:t>
             </a:r>
           </a:p>
         </p:txBody>
@@ -3696,8 +3696,8 @@
         </p:nvSpPr>
         <p:spPr>
           <a:xfrm>
-            <a:off x="594360" y="4672584"/>
-            <a:ext cx="11002975" cy="347472"/>
+            <a:off x="640080" y="4896612"/>
+            <a:ext cx="10911535" cy="310896"/>
           </a:xfrm>
           <a:prstGeom prst="rect">
             <a:avLst/>
@@ -3714,11 +3714,11 @@
             <a:r>
               <a:rPr sz="2000" b="0" i="1">
                 <a:solidFill>
-                  <a:srgbClr val="8C8C8C"/>
+                  <a:srgbClr val="828282"/>
                 </a:solidFill>
                 <a:latin typeface="Arial"/>
               </a:rPr>
-              <a:t/>
+              <a:t>Foi a graça que ensinou meu coração a temer</a:t>
             </a:r>
           </a:p>
         </p:txBody>
@@ -3757,8 +3757,8 @@
         </p:nvSpPr>
         <p:spPr>
           <a:xfrm>
-            <a:off x="594360" y="1837944"/>
-            <a:ext cx="11002975" cy="685800"/>
+            <a:off x="640080" y="1650492"/>
+            <a:ext cx="10911535" cy="731520"/>
           </a:xfrm>
           <a:prstGeom prst="rect">
             <a:avLst/>
@@ -3773,7 +3773,7 @@
           <a:p>
             <a:pPr algn="ctr"/>
             <a:r>
-              <a:rPr sz="4400" b="1" i="0">
+              <a:rPr sz="4800" b="1" i="0">
                 <a:solidFill>
                   <a:srgbClr val="FFFFFF"/>
                 </a:solidFill>
@@ -3792,8 +3792,8 @@
         </p:nvSpPr>
         <p:spPr>
           <a:xfrm>
-            <a:off x="594360" y="2560320"/>
-            <a:ext cx="11002975" cy="384048"/>
+            <a:off x="640080" y="2418588"/>
+            <a:ext cx="10911535" cy="365760"/>
           </a:xfrm>
           <a:prstGeom prst="rect">
             <a:avLst/>
@@ -3810,7 +3810,7 @@
             <a:r>
               <a:rPr sz="2400" b="0" i="1">
                 <a:solidFill>
-                  <a:srgbClr val="B4B4B4"/>
+                  <a:srgbClr val="AAAAAA"/>
                 </a:solidFill>
                 <a:latin typeface="Arial"/>
               </a:rPr>
@@ -3827,8 +3827,8 @@
         </p:nvSpPr>
         <p:spPr>
           <a:xfrm>
-            <a:off x="594360" y="2980944"/>
-            <a:ext cx="11002975" cy="347472"/>
+            <a:off x="640080" y="2985516"/>
+            <a:ext cx="10911535" cy="731520"/>
           </a:xfrm>
           <a:prstGeom prst="rect">
             <a:avLst/>
@@ -3843,13 +3843,13 @@
           <a:p>
             <a:pPr algn="ctr"/>
             <a:r>
-              <a:rPr sz="2000" b="0" i="1">
-                <a:solidFill>
-                  <a:srgbClr val="8C8C8C"/>
+              <a:rPr sz="4800" b="1" i="0">
+                <a:solidFill>
+                  <a:srgbClr val="FFFFFF"/>
                 </a:solidFill>
                 <a:latin typeface="Arial"/>
               </a:rPr>
-              <a:t/>
+              <a:t>あわれ-み流れる  恵と   主の愛</a:t>
             </a:r>
           </a:p>
         </p:txBody>
@@ -3862,8 +3862,8 @@
         </p:nvSpPr>
         <p:spPr>
           <a:xfrm>
-            <a:off x="594360" y="3529584"/>
-            <a:ext cx="11002975" cy="685800"/>
+            <a:off x="640080" y="3753612"/>
+            <a:ext cx="10911535" cy="365760"/>
           </a:xfrm>
           <a:prstGeom prst="rect">
             <a:avLst/>
@@ -3878,13 +3878,13 @@
           <a:p>
             <a:pPr algn="ctr"/>
             <a:r>
-              <a:rPr sz="4400" b="1" i="0">
-                <a:solidFill>
-                  <a:srgbClr val="FFFFFF"/>
+              <a:rPr sz="2400" b="0" i="1">
+                <a:solidFill>
+                  <a:srgbClr val="AAAAAA"/>
                 </a:solidFill>
                 <a:latin typeface="Arial"/>
               </a:rPr>
-              <a:t>あわれ-み流れる  恵と   主の愛</a:t>
+              <a:t>aware mi nagareru megumi to shu no ai</a:t>
             </a:r>
           </a:p>
         </p:txBody>
@@ -3897,8 +3897,8 @@
         </p:nvSpPr>
         <p:spPr>
           <a:xfrm>
-            <a:off x="594360" y="4251960"/>
-            <a:ext cx="11002975" cy="384048"/>
+            <a:off x="640080" y="4530852"/>
+            <a:ext cx="10911535" cy="310896"/>
           </a:xfrm>
           <a:prstGeom prst="rect">
             <a:avLst/>
@@ -3913,13 +3913,13 @@
           <a:p>
             <a:pPr algn="ctr"/>
             <a:r>
-              <a:rPr sz="2400" b="0" i="1">
-                <a:solidFill>
-                  <a:srgbClr val="B4B4B4"/>
+              <a:rPr sz="2000" b="0" i="1">
+                <a:solidFill>
+                  <a:srgbClr val="828282"/>
                 </a:solidFill>
                 <a:latin typeface="Arial"/>
               </a:rPr>
-              <a:t>aware mi nagareru megumi to shu no ai</a:t>
+              <a:t>Na hora em que eu acreditei</a:t>
             </a:r>
           </a:p>
         </p:txBody>
@@ -3932,8 +3932,8 @@
         </p:nvSpPr>
         <p:spPr>
           <a:xfrm>
-            <a:off x="594360" y="4672584"/>
-            <a:ext cx="11002975" cy="347472"/>
+            <a:off x="640080" y="4896612"/>
+            <a:ext cx="10911535" cy="310896"/>
           </a:xfrm>
           <a:prstGeom prst="rect">
             <a:avLst/>
@@ -3950,11 +3950,11 @@
             <a:r>
               <a:rPr sz="2000" b="0" i="1">
                 <a:solidFill>
-                  <a:srgbClr val="8C8C8C"/>
+                  <a:srgbClr val="828282"/>
                 </a:solidFill>
                 <a:latin typeface="Arial"/>
               </a:rPr>
-              <a:t/>
+              <a:t>Minhas correntes se foram, eu fui liberto</a:t>
             </a:r>
           </a:p>
         </p:txBody>
@@ -3993,8 +3993,8 @@
         </p:nvSpPr>
         <p:spPr>
           <a:xfrm>
-            <a:off x="594360" y="2258568"/>
-            <a:ext cx="11002975" cy="685800"/>
+            <a:off x="640080" y="2052828"/>
+            <a:ext cx="10911535" cy="731520"/>
           </a:xfrm>
           <a:prstGeom prst="rect">
             <a:avLst/>
@@ -4009,7 +4009,7 @@
           <a:p>
             <a:pPr algn="ctr"/>
             <a:r>
-              <a:rPr sz="4400" b="1" i="0">
+              <a:rPr sz="4800" b="1" i="0">
                 <a:solidFill>
                   <a:srgbClr val="FFFFFF"/>
                 </a:solidFill>
@@ -4028,8 +4028,8 @@
         </p:nvSpPr>
         <p:spPr>
           <a:xfrm>
-            <a:off x="594360" y="2980944"/>
-            <a:ext cx="11002975" cy="347472"/>
+            <a:off x="640080" y="2985516"/>
+            <a:ext cx="10911535" cy="731520"/>
           </a:xfrm>
           <a:prstGeom prst="rect">
             <a:avLst/>
@@ -4044,13 +4044,13 @@
           <a:p>
             <a:pPr algn="ctr"/>
             <a:r>
-              <a:rPr sz="2200" b="0" i="1">
-                <a:solidFill>
-                  <a:srgbClr val="8C8C8C"/>
+              <a:rPr sz="3700" b="1" i="0">
+                <a:solidFill>
+                  <a:srgbClr val="FFFFFF"/>
                 </a:solidFill>
                 <a:latin typeface="Arial"/>
               </a:rPr>
-              <a:t/>
+              <a:t>Minhas correntes se foram, eu fui liberto</a:t>
             </a:r>
           </a:p>
         </p:txBody>
@@ -4063,8 +4063,8 @@
         </p:nvSpPr>
         <p:spPr>
           <a:xfrm>
-            <a:off x="594360" y="3529584"/>
-            <a:ext cx="11002975" cy="685800"/>
+            <a:off x="640080" y="4128516"/>
+            <a:ext cx="10911535" cy="310896"/>
           </a:xfrm>
           <a:prstGeom prst="rect">
             <a:avLst/>
@@ -4079,13 +4079,13 @@
           <a:p>
             <a:pPr algn="ctr"/>
             <a:r>
-              <a:rPr sz="3434" b="1" i="0">
-                <a:solidFill>
-                  <a:srgbClr val="FFFFFF"/>
+              <a:rPr sz="2000" b="0" i="0">
+                <a:solidFill>
+                  <a:srgbClr val="828282"/>
                 </a:solidFill>
                 <a:latin typeface="Arial"/>
               </a:rPr>
-              <a:t>Minhas correntes se foram, eu fui liberto</a:t>
+              <a:t>鎖 - は解かれて 　罪人が自由に</a:t>
             </a:r>
           </a:p>
         </p:txBody>
@@ -4098,8 +4098,8 @@
         </p:nvSpPr>
         <p:spPr>
           <a:xfrm>
-            <a:off x="594360" y="4251960"/>
-            <a:ext cx="11002975" cy="347472"/>
+            <a:off x="640080" y="4494276"/>
+            <a:ext cx="10911535" cy="310896"/>
           </a:xfrm>
           <a:prstGeom prst="rect">
             <a:avLst/>
@@ -4114,13 +4114,13 @@
           <a:p>
             <a:pPr algn="ctr"/>
             <a:r>
-              <a:rPr sz="2200" b="0" i="1">
-                <a:solidFill>
-                  <a:srgbClr val="8C8C8C"/>
+              <a:rPr sz="2000" b="0" i="0">
+                <a:solidFill>
+                  <a:srgbClr val="828282"/>
                 </a:solidFill>
                 <a:latin typeface="Arial"/>
               </a:rPr>
-              <a:t/>
+              <a:t>あわれ-み流れる  恵と   主の愛</a:t>
             </a:r>
           </a:p>
         </p:txBody>
@@ -4159,8 +4159,8 @@
         </p:nvSpPr>
         <p:spPr>
           <a:xfrm>
-            <a:off x="594360" y="2258568"/>
-            <a:ext cx="11002975" cy="685800"/>
+            <a:off x="640080" y="2052828"/>
+            <a:ext cx="10911535" cy="731520"/>
           </a:xfrm>
           <a:prstGeom prst="rect">
             <a:avLst/>
@@ -4175,7 +4175,7 @@
           <a:p>
             <a:pPr algn="ctr"/>
             <a:r>
-              <a:rPr sz="4022" b="1" i="0">
+              <a:rPr sz="4300" b="1" i="0">
                 <a:solidFill>
                   <a:srgbClr val="FFFFFF"/>
                 </a:solidFill>
@@ -4194,8 +4194,8 @@
         </p:nvSpPr>
         <p:spPr>
           <a:xfrm>
-            <a:off x="594360" y="2980944"/>
-            <a:ext cx="11002975" cy="347472"/>
+            <a:off x="640080" y="2985516"/>
+            <a:ext cx="10911535" cy="731520"/>
           </a:xfrm>
           <a:prstGeom prst="rect">
             <a:avLst/>
@@ -4210,13 +4210,13 @@
           <a:p>
             <a:pPr algn="ctr"/>
             <a:r>
-              <a:rPr sz="2200" b="0" i="1">
-                <a:solidFill>
-                  <a:srgbClr val="8C8C8C"/>
+              <a:rPr sz="3600" b="1" i="0">
+                <a:solidFill>
+                  <a:srgbClr val="FFFFFF"/>
                 </a:solidFill>
                 <a:latin typeface="Arial"/>
               </a:rPr>
-              <a:t/>
+              <a:t>E como num dilúvio, Sua misericórdia chove</a:t>
             </a:r>
           </a:p>
         </p:txBody>
@@ -4229,8 +4229,8 @@
         </p:nvSpPr>
         <p:spPr>
           <a:xfrm>
-            <a:off x="594360" y="3529584"/>
-            <a:ext cx="11002975" cy="685800"/>
+            <a:off x="640080" y="4128516"/>
+            <a:ext cx="10911535" cy="310896"/>
           </a:xfrm>
           <a:prstGeom prst="rect">
             <a:avLst/>
@@ -4245,13 +4245,13 @@
           <a:p>
             <a:pPr algn="ctr"/>
             <a:r>
-              <a:rPr sz="3352" b="1" i="0">
-                <a:solidFill>
-                  <a:srgbClr val="FFFFFF"/>
+              <a:rPr sz="2000" b="0" i="0">
+                <a:solidFill>
+                  <a:srgbClr val="828282"/>
                 </a:solidFill>
                 <a:latin typeface="Arial"/>
               </a:rPr>
-              <a:t>E como num dilúvio, Sua misericórdia chove</a:t>
+              <a:t>鎖 - は解かれて 　罪人が自由に</a:t>
             </a:r>
           </a:p>
         </p:txBody>
@@ -4264,8 +4264,8 @@
         </p:nvSpPr>
         <p:spPr>
           <a:xfrm>
-            <a:off x="594360" y="4251960"/>
-            <a:ext cx="11002975" cy="347472"/>
+            <a:off x="640080" y="4494276"/>
+            <a:ext cx="10911535" cy="310896"/>
           </a:xfrm>
           <a:prstGeom prst="rect">
             <a:avLst/>
@@ -4280,13 +4280,13 @@
           <a:p>
             <a:pPr algn="ctr"/>
             <a:r>
-              <a:rPr sz="2200" b="0" i="1">
-                <a:solidFill>
-                  <a:srgbClr val="8C8C8C"/>
+              <a:rPr sz="2000" b="0" i="0">
+                <a:solidFill>
+                  <a:srgbClr val="828282"/>
                 </a:solidFill>
                 <a:latin typeface="Arial"/>
               </a:rPr>
-              <a:t/>
+              <a:t>あわれ-み流れる  恵と   主の愛</a:t>
             </a:r>
           </a:p>
         </p:txBody>
@@ -4325,8 +4325,8 @@
         </p:nvSpPr>
         <p:spPr>
           <a:xfrm>
-            <a:off x="594360" y="2258568"/>
-            <a:ext cx="11002975" cy="685800"/>
+            <a:off x="640080" y="2052828"/>
+            <a:ext cx="10911535" cy="731520"/>
           </a:xfrm>
           <a:prstGeom prst="rect">
             <a:avLst/>
@@ -4341,7 +4341,7 @@
           <a:p>
             <a:pPr algn="ctr"/>
             <a:r>
-              <a:rPr sz="4400" b="1" i="0">
+              <a:rPr sz="4800" b="1" i="0">
                 <a:solidFill>
                   <a:srgbClr val="FFFFFF"/>
                 </a:solidFill>
@@ -4360,8 +4360,8 @@
         </p:nvSpPr>
         <p:spPr>
           <a:xfrm>
-            <a:off x="594360" y="2980944"/>
-            <a:ext cx="11002975" cy="347472"/>
+            <a:off x="640080" y="2985516"/>
+            <a:ext cx="10911535" cy="731520"/>
           </a:xfrm>
           <a:prstGeom prst="rect">
             <a:avLst/>
@@ -4376,83 +4376,13 @@
           <a:p>
             <a:pPr algn="ctr"/>
             <a:r>
-              <a:rPr sz="2200" b="0" i="1">
-                <a:solidFill>
-                  <a:srgbClr val="8C8C8C"/>
-                </a:solidFill>
-                <a:latin typeface="Arial"/>
-              </a:rPr>
-              <a:t/>
-            </a:r>
-          </a:p>
-        </p:txBody>
-      </p:sp>
-      <p:sp>
-        <p:nvSpPr>
-          <p:cNvPr id="4" name="TextBox 3"/>
-          <p:cNvSpPr txBox="1"/>
-          <p:nvPr/>
-        </p:nvSpPr>
-        <p:spPr>
-          <a:xfrm>
-            <a:off x="594360" y="3529584"/>
-            <a:ext cx="11002975" cy="685800"/>
-          </a:xfrm>
-          <a:prstGeom prst="rect">
-            <a:avLst/>
-          </a:prstGeom>
-          <a:noFill/>
-        </p:spPr>
-        <p:txBody>
-          <a:bodyPr wrap="square">
-            <a:spAutoFit/>
-          </a:bodyPr>
-          <a:lstStyle/>
-          <a:p>
-            <a:pPr algn="ctr"/>
-            <a:r>
-              <a:rPr sz="3911" b="1" i="0">
+              <a:rPr sz="4200" b="1" i="0">
                 <a:solidFill>
                   <a:srgbClr val="FFFFFF"/>
                 </a:solidFill>
                 <a:latin typeface="Arial"/>
               </a:rPr>
               <a:t>Sua palavra assegura minha esperança</a:t>
-            </a:r>
-          </a:p>
-        </p:txBody>
-      </p:sp>
-      <p:sp>
-        <p:nvSpPr>
-          <p:cNvPr id="5" name="TextBox 4"/>
-          <p:cNvSpPr txBox="1"/>
-          <p:nvPr/>
-        </p:nvSpPr>
-        <p:spPr>
-          <a:xfrm>
-            <a:off x="594360" y="4251960"/>
-            <a:ext cx="11002975" cy="347472"/>
-          </a:xfrm>
-          <a:prstGeom prst="rect">
-            <a:avLst/>
-          </a:prstGeom>
-          <a:noFill/>
-        </p:spPr>
-        <p:txBody>
-          <a:bodyPr wrap="square">
-            <a:spAutoFit/>
-          </a:bodyPr>
-          <a:lstStyle/>
-          <a:p>
-            <a:pPr algn="ctr"/>
-            <a:r>
-              <a:rPr sz="2200" b="0" i="1">
-                <a:solidFill>
-                  <a:srgbClr val="8C8C8C"/>
-                </a:solidFill>
-                <a:latin typeface="Arial"/>
-              </a:rPr>
-              <a:t/>
             </a:r>
           </a:p>
         </p:txBody>
@@ -4491,8 +4421,8 @@
         </p:nvSpPr>
         <p:spPr>
           <a:xfrm>
-            <a:off x="594360" y="2258568"/>
-            <a:ext cx="11002975" cy="685800"/>
+            <a:off x="640080" y="2052828"/>
+            <a:ext cx="10911535" cy="731520"/>
           </a:xfrm>
           <a:prstGeom prst="rect">
             <a:avLst/>
@@ -4507,7 +4437,7 @@
           <a:p>
             <a:pPr algn="ctr"/>
             <a:r>
-              <a:rPr sz="4400" b="1" i="0">
+              <a:rPr sz="4800" b="1" i="0">
                 <a:solidFill>
                   <a:srgbClr val="FFFFFF"/>
                 </a:solidFill>
@@ -4526,8 +4456,8 @@
         </p:nvSpPr>
         <p:spPr>
           <a:xfrm>
-            <a:off x="594360" y="2980944"/>
-            <a:ext cx="11002975" cy="347472"/>
+            <a:off x="640080" y="2985516"/>
+            <a:ext cx="10911535" cy="731520"/>
           </a:xfrm>
           <a:prstGeom prst="rect">
             <a:avLst/>
@@ -4542,83 +4472,13 @@
           <a:p>
             <a:pPr algn="ctr"/>
             <a:r>
-              <a:rPr sz="2200" b="0" i="1">
-                <a:solidFill>
-                  <a:srgbClr val="8C8C8C"/>
-                </a:solidFill>
-                <a:latin typeface="Arial"/>
-              </a:rPr>
-              <a:t/>
-            </a:r>
-          </a:p>
-        </p:txBody>
-      </p:sp>
-      <p:sp>
-        <p:nvSpPr>
-          <p:cNvPr id="4" name="TextBox 3"/>
-          <p:cNvSpPr txBox="1"/>
-          <p:nvPr/>
-        </p:nvSpPr>
-        <p:spPr>
-          <a:xfrm>
-            <a:off x="594360" y="3529584"/>
-            <a:ext cx="11002975" cy="685800"/>
-          </a:xfrm>
-          <a:prstGeom prst="rect">
-            <a:avLst/>
-          </a:prstGeom>
-          <a:noFill/>
-        </p:spPr>
-        <p:txBody>
-          <a:bodyPr wrap="square">
-            <a:spAutoFit/>
-          </a:bodyPr>
-          <a:lstStyle/>
-          <a:p>
-            <a:pPr algn="ctr"/>
-            <a:r>
-              <a:rPr sz="4400" b="1" i="0">
+              <a:rPr sz="4800" b="1" i="0">
                 <a:solidFill>
                   <a:srgbClr val="FFFFFF"/>
                 </a:solidFill>
                 <a:latin typeface="Arial"/>
               </a:rPr>
               <a:t>Enquanto a vida durar</a:t>
-            </a:r>
-          </a:p>
-        </p:txBody>
-      </p:sp>
-      <p:sp>
-        <p:nvSpPr>
-          <p:cNvPr id="5" name="TextBox 4"/>
-          <p:cNvSpPr txBox="1"/>
-          <p:nvPr/>
-        </p:nvSpPr>
-        <p:spPr>
-          <a:xfrm>
-            <a:off x="594360" y="4251960"/>
-            <a:ext cx="11002975" cy="347472"/>
-          </a:xfrm>
-          <a:prstGeom prst="rect">
-            <a:avLst/>
-          </a:prstGeom>
-          <a:noFill/>
-        </p:spPr>
-        <p:txBody>
-          <a:bodyPr wrap="square">
-            <a:spAutoFit/>
-          </a:bodyPr>
-          <a:lstStyle/>
-          <a:p>
-            <a:pPr algn="ctr"/>
-            <a:r>
-              <a:rPr sz="2200" b="0" i="1">
-                <a:solidFill>
-                  <a:srgbClr val="8C8C8C"/>
-                </a:solidFill>
-                <a:latin typeface="Arial"/>
-              </a:rPr>
-              <a:t/>
             </a:r>
           </a:p>
         </p:txBody>
@@ -4657,8 +4517,8 @@
         </p:nvSpPr>
         <p:spPr>
           <a:xfrm>
-            <a:off x="594360" y="2258568"/>
-            <a:ext cx="11002975" cy="685800"/>
+            <a:off x="640080" y="2052828"/>
+            <a:ext cx="10911535" cy="731520"/>
           </a:xfrm>
           <a:prstGeom prst="rect">
             <a:avLst/>
@@ -4673,7 +4533,7 @@
           <a:p>
             <a:pPr algn="ctr"/>
             <a:r>
-              <a:rPr sz="4400" b="1" i="0">
+              <a:rPr sz="4800" b="1" i="0">
                 <a:solidFill>
                   <a:srgbClr val="FFFFFF"/>
                 </a:solidFill>
@@ -4692,8 +4552,8 @@
         </p:nvSpPr>
         <p:spPr>
           <a:xfrm>
-            <a:off x="594360" y="2980944"/>
-            <a:ext cx="11002975" cy="347472"/>
+            <a:off x="640080" y="2985516"/>
+            <a:ext cx="10911535" cy="731520"/>
           </a:xfrm>
           <a:prstGeom prst="rect">
             <a:avLst/>
@@ -4708,83 +4568,13 @@
           <a:p>
             <a:pPr algn="ctr"/>
             <a:r>
-              <a:rPr sz="2200" b="0" i="1">
-                <a:solidFill>
-                  <a:srgbClr val="8C8C8C"/>
-                </a:solidFill>
-                <a:latin typeface="Arial"/>
-              </a:rPr>
-              <a:t/>
-            </a:r>
-          </a:p>
-        </p:txBody>
-      </p:sp>
-      <p:sp>
-        <p:nvSpPr>
-          <p:cNvPr id="4" name="TextBox 3"/>
-          <p:cNvSpPr txBox="1"/>
-          <p:nvPr/>
-        </p:nvSpPr>
-        <p:spPr>
-          <a:xfrm>
-            <a:off x="594360" y="3529584"/>
-            <a:ext cx="11002975" cy="685800"/>
-          </a:xfrm>
-          <a:prstGeom prst="rect">
-            <a:avLst/>
-          </a:prstGeom>
-          <a:noFill/>
-        </p:spPr>
-        <p:txBody>
-          <a:bodyPr wrap="square">
-            <a:spAutoFit/>
-          </a:bodyPr>
-          <a:lstStyle/>
-          <a:p>
-            <a:pPr algn="ctr"/>
-            <a:r>
-              <a:rPr sz="3274" b="1" i="0">
+              <a:rPr sz="3500" b="1" i="0">
                 <a:solidFill>
                   <a:srgbClr val="FFFFFF"/>
                 </a:solidFill>
                 <a:latin typeface="Arial"/>
               </a:rPr>
               <a:t>Eu estive perdido, mas agora fui encontrado</a:t>
-            </a:r>
-          </a:p>
-        </p:txBody>
-      </p:sp>
-      <p:sp>
-        <p:nvSpPr>
-          <p:cNvPr id="5" name="TextBox 4"/>
-          <p:cNvSpPr txBox="1"/>
-          <p:nvPr/>
-        </p:nvSpPr>
-        <p:spPr>
-          <a:xfrm>
-            <a:off x="594360" y="4251960"/>
-            <a:ext cx="11002975" cy="347472"/>
-          </a:xfrm>
-          <a:prstGeom prst="rect">
-            <a:avLst/>
-          </a:prstGeom>
-          <a:noFill/>
-        </p:spPr>
-        <p:txBody>
-          <a:bodyPr wrap="square">
-            <a:spAutoFit/>
-          </a:bodyPr>
-          <a:lstStyle/>
-          <a:p>
-            <a:pPr algn="ctr"/>
-            <a:r>
-              <a:rPr sz="2200" b="0" i="1">
-                <a:solidFill>
-                  <a:srgbClr val="8C8C8C"/>
-                </a:solidFill>
-                <a:latin typeface="Arial"/>
-              </a:rPr>
-              <a:t/>
             </a:r>
           </a:p>
         </p:txBody>
@@ -4823,8 +4613,8 @@
         </p:nvSpPr>
         <p:spPr>
           <a:xfrm>
-            <a:off x="594360" y="2258568"/>
-            <a:ext cx="11002975" cy="685800"/>
+            <a:off x="640080" y="2052828"/>
+            <a:ext cx="10911535" cy="731520"/>
           </a:xfrm>
           <a:prstGeom prst="rect">
             <a:avLst/>
@@ -4839,7 +4629,7 @@
           <a:p>
             <a:pPr algn="ctr"/>
             <a:r>
-              <a:rPr sz="4400" b="1" i="0">
+              <a:rPr sz="4800" b="1" i="0">
                 <a:solidFill>
                   <a:srgbClr val="FFFFFF"/>
                 </a:solidFill>
@@ -4858,8 +4648,8 @@
         </p:nvSpPr>
         <p:spPr>
           <a:xfrm>
-            <a:off x="594360" y="2980944"/>
-            <a:ext cx="11002975" cy="347472"/>
+            <a:off x="640080" y="2985516"/>
+            <a:ext cx="10911535" cy="731520"/>
           </a:xfrm>
           <a:prstGeom prst="rect">
             <a:avLst/>
@@ -4874,13 +4664,13 @@
           <a:p>
             <a:pPr algn="ctr"/>
             <a:r>
-              <a:rPr sz="2200" b="0" i="1">
-                <a:solidFill>
-                  <a:srgbClr val="8C8C8C"/>
+              <a:rPr sz="3500" b="1" i="0">
+                <a:solidFill>
+                  <a:srgbClr val="FFFFFF"/>
                 </a:solidFill>
                 <a:latin typeface="Arial"/>
               </a:rPr>
-              <a:t/>
+              <a:t>Foi a graça que ensinou meu coração a temer</a:t>
             </a:r>
           </a:p>
         </p:txBody>
@@ -4893,8 +4683,8 @@
         </p:nvSpPr>
         <p:spPr>
           <a:xfrm>
-            <a:off x="594360" y="3529584"/>
-            <a:ext cx="11002975" cy="685800"/>
+            <a:off x="640080" y="4128516"/>
+            <a:ext cx="10911535" cy="310896"/>
           </a:xfrm>
           <a:prstGeom prst="rect">
             <a:avLst/>
@@ -4909,13 +4699,13 @@
           <a:p>
             <a:pPr algn="ctr"/>
             <a:r>
-              <a:rPr sz="3274" b="1" i="0">
-                <a:solidFill>
-                  <a:srgbClr val="FFFFFF"/>
+              <a:rPr sz="2000" b="0" i="0">
+                <a:solidFill>
+                  <a:srgbClr val="828282"/>
                 </a:solidFill>
                 <a:latin typeface="Arial"/>
               </a:rPr>
-              <a:t>Foi a graça que ensinou meu coração a temer</a:t>
+              <a:t>めぐみはわが身の おそれを消し</a:t>
             </a:r>
           </a:p>
         </p:txBody>
@@ -4928,8 +4718,8 @@
         </p:nvSpPr>
         <p:spPr>
           <a:xfrm>
-            <a:off x="594360" y="4251960"/>
-            <a:ext cx="11002975" cy="347472"/>
+            <a:off x="640080" y="4494276"/>
+            <a:ext cx="10911535" cy="310896"/>
           </a:xfrm>
           <a:prstGeom prst="rect">
             <a:avLst/>
@@ -4944,13 +4734,13 @@
           <a:p>
             <a:pPr algn="ctr"/>
             <a:r>
-              <a:rPr sz="2200" b="0" i="1">
-                <a:solidFill>
-                  <a:srgbClr val="8C8C8C"/>
+              <a:rPr sz="2000" b="0" i="0">
+                <a:solidFill>
+                  <a:srgbClr val="828282"/>
                 </a:solidFill>
                 <a:latin typeface="Arial"/>
               </a:rPr>
-              <a:t/>
+              <a:t>まかするこころを おこさせたり</a:t>
             </a:r>
           </a:p>
         </p:txBody>
@@ -4989,8 +4779,8 @@
         </p:nvSpPr>
         <p:spPr>
           <a:xfrm>
-            <a:off x="594360" y="2258568"/>
-            <a:ext cx="11002975" cy="685800"/>
+            <a:off x="640080" y="2052828"/>
+            <a:ext cx="10911535" cy="731520"/>
           </a:xfrm>
           <a:prstGeom prst="rect">
             <a:avLst/>
@@ -5005,7 +4795,7 @@
           <a:p>
             <a:pPr algn="ctr"/>
             <a:r>
-              <a:rPr sz="4400" b="1" i="0">
+              <a:rPr sz="4800" b="1" i="0">
                 <a:solidFill>
                   <a:srgbClr val="FFFFFF"/>
                 </a:solidFill>
@@ -5024,8 +4814,8 @@
         </p:nvSpPr>
         <p:spPr>
           <a:xfrm>
-            <a:off x="594360" y="2980944"/>
-            <a:ext cx="11002975" cy="347472"/>
+            <a:off x="640080" y="2985516"/>
+            <a:ext cx="10911535" cy="731520"/>
           </a:xfrm>
           <a:prstGeom prst="rect">
             <a:avLst/>
@@ -5040,83 +4830,13 @@
           <a:p>
             <a:pPr algn="ctr"/>
             <a:r>
-              <a:rPr sz="2200" b="0" i="1">
-                <a:solidFill>
-                  <a:srgbClr val="8C8C8C"/>
-                </a:solidFill>
-                <a:latin typeface="Arial"/>
-              </a:rPr>
-              <a:t/>
-            </a:r>
-          </a:p>
-        </p:txBody>
-      </p:sp>
-      <p:sp>
-        <p:nvSpPr>
-          <p:cNvPr id="4" name="TextBox 3"/>
-          <p:cNvSpPr txBox="1"/>
-          <p:nvPr/>
-        </p:nvSpPr>
-        <p:spPr>
-          <a:xfrm>
-            <a:off x="594360" y="3529584"/>
-            <a:ext cx="11002975" cy="685800"/>
-          </a:xfrm>
-          <a:prstGeom prst="rect">
-            <a:avLst/>
-          </a:prstGeom>
-          <a:noFill/>
-        </p:spPr>
-        <p:txBody>
-          <a:bodyPr wrap="square">
-            <a:spAutoFit/>
-          </a:bodyPr>
-          <a:lstStyle/>
-          <a:p>
-            <a:pPr algn="ctr"/>
-            <a:r>
-              <a:rPr sz="3805" b="1" i="0">
+              <a:rPr sz="4100" b="1" i="0">
                 <a:solidFill>
                   <a:srgbClr val="FFFFFF"/>
                 </a:solidFill>
                 <a:latin typeface="Arial"/>
               </a:rPr>
               <a:t>Quão preciosa foi a aparição da graça</a:t>
-            </a:r>
-          </a:p>
-        </p:txBody>
-      </p:sp>
-      <p:sp>
-        <p:nvSpPr>
-          <p:cNvPr id="5" name="TextBox 4"/>
-          <p:cNvSpPr txBox="1"/>
-          <p:nvPr/>
-        </p:nvSpPr>
-        <p:spPr>
-          <a:xfrm>
-            <a:off x="594360" y="4251960"/>
-            <a:ext cx="11002975" cy="347472"/>
-          </a:xfrm>
-          <a:prstGeom prst="rect">
-            <a:avLst/>
-          </a:prstGeom>
-          <a:noFill/>
-        </p:spPr>
-        <p:txBody>
-          <a:bodyPr wrap="square">
-            <a:spAutoFit/>
-          </a:bodyPr>
-          <a:lstStyle/>
-          <a:p>
-            <a:pPr algn="ctr"/>
-            <a:r>
-              <a:rPr sz="2200" b="0" i="1">
-                <a:solidFill>
-                  <a:srgbClr val="8C8C8C"/>
-                </a:solidFill>
-                <a:latin typeface="Arial"/>
-              </a:rPr>
-              <a:t/>
             </a:r>
           </a:p>
         </p:txBody>
@@ -5155,8 +4875,8 @@
         </p:nvSpPr>
         <p:spPr>
           <a:xfrm>
-            <a:off x="594360" y="2258568"/>
-            <a:ext cx="11002975" cy="685800"/>
+            <a:off x="640080" y="2052828"/>
+            <a:ext cx="10911535" cy="731520"/>
           </a:xfrm>
           <a:prstGeom prst="rect">
             <a:avLst/>
@@ -5171,7 +4891,7 @@
           <a:p>
             <a:pPr algn="ctr"/>
             <a:r>
-              <a:rPr sz="4400" b="1" i="0">
+              <a:rPr sz="4800" b="1" i="0">
                 <a:solidFill>
                   <a:srgbClr val="FFFFFF"/>
                 </a:solidFill>
@@ -5190,8 +4910,8 @@
         </p:nvSpPr>
         <p:spPr>
           <a:xfrm>
-            <a:off x="594360" y="2980944"/>
-            <a:ext cx="11002975" cy="347472"/>
+            <a:off x="640080" y="2985516"/>
+            <a:ext cx="10911535" cy="731520"/>
           </a:xfrm>
           <a:prstGeom prst="rect">
             <a:avLst/>
@@ -5206,13 +4926,13 @@
           <a:p>
             <a:pPr algn="ctr"/>
             <a:r>
-              <a:rPr sz="2200" b="0" i="1">
-                <a:solidFill>
-                  <a:srgbClr val="8C8C8C"/>
+              <a:rPr sz="3700" b="1" i="0">
+                <a:solidFill>
+                  <a:srgbClr val="FFFFFF"/>
                 </a:solidFill>
                 <a:latin typeface="Arial"/>
               </a:rPr>
-              <a:t/>
+              <a:t>Minhas correntes se foram, eu fui liberto</a:t>
             </a:r>
           </a:p>
         </p:txBody>
@@ -5225,8 +4945,8 @@
         </p:nvSpPr>
         <p:spPr>
           <a:xfrm>
-            <a:off x="594360" y="3529584"/>
-            <a:ext cx="11002975" cy="685800"/>
+            <a:off x="640080" y="4128516"/>
+            <a:ext cx="10911535" cy="310896"/>
           </a:xfrm>
           <a:prstGeom prst="rect">
             <a:avLst/>
@@ -5241,13 +4961,13 @@
           <a:p>
             <a:pPr algn="ctr"/>
             <a:r>
-              <a:rPr sz="3434" b="1" i="0">
-                <a:solidFill>
-                  <a:srgbClr val="FFFFFF"/>
+              <a:rPr sz="2000" b="0" i="0">
+                <a:solidFill>
+                  <a:srgbClr val="828282"/>
                 </a:solidFill>
                 <a:latin typeface="Arial"/>
               </a:rPr>
-              <a:t>Minhas correntes se foram, eu fui liberto</a:t>
+              <a:t>鎖 - は解かれて 　罪人が自由に</a:t>
             </a:r>
           </a:p>
         </p:txBody>
@@ -5260,8 +4980,8 @@
         </p:nvSpPr>
         <p:spPr>
           <a:xfrm>
-            <a:off x="594360" y="4251960"/>
-            <a:ext cx="11002975" cy="347472"/>
+            <a:off x="640080" y="4494276"/>
+            <a:ext cx="10911535" cy="310896"/>
           </a:xfrm>
           <a:prstGeom prst="rect">
             <a:avLst/>
@@ -5276,13 +4996,13 @@
           <a:p>
             <a:pPr algn="ctr"/>
             <a:r>
-              <a:rPr sz="2200" b="0" i="1">
-                <a:solidFill>
-                  <a:srgbClr val="8C8C8C"/>
+              <a:rPr sz="2000" b="0" i="0">
+                <a:solidFill>
+                  <a:srgbClr val="828282"/>
                 </a:solidFill>
                 <a:latin typeface="Arial"/>
               </a:rPr>
-              <a:t/>
+              <a:t>あわれ-み流れる  恵と   主の愛</a:t>
             </a:r>
           </a:p>
         </p:txBody>
@@ -5321,8 +5041,8 @@
         </p:nvSpPr>
         <p:spPr>
           <a:xfrm>
-            <a:off x="594360" y="2258568"/>
-            <a:ext cx="11002975" cy="685800"/>
+            <a:off x="640080" y="2052828"/>
+            <a:ext cx="10911535" cy="731520"/>
           </a:xfrm>
           <a:prstGeom prst="rect">
             <a:avLst/>
@@ -5337,7 +5057,7 @@
           <a:p>
             <a:pPr algn="ctr"/>
             <a:r>
-              <a:rPr sz="4022" b="1" i="0">
+              <a:rPr sz="4300" b="1" i="0">
                 <a:solidFill>
                   <a:srgbClr val="FFFFFF"/>
                 </a:solidFill>
@@ -5356,8 +5076,8 @@
         </p:nvSpPr>
         <p:spPr>
           <a:xfrm>
-            <a:off x="594360" y="2980944"/>
-            <a:ext cx="11002975" cy="347472"/>
+            <a:off x="640080" y="2985516"/>
+            <a:ext cx="10911535" cy="731520"/>
           </a:xfrm>
           <a:prstGeom prst="rect">
             <a:avLst/>
@@ -5372,13 +5092,13 @@
           <a:p>
             <a:pPr algn="ctr"/>
             <a:r>
-              <a:rPr sz="2200" b="0" i="1">
-                <a:solidFill>
-                  <a:srgbClr val="8C8C8C"/>
+              <a:rPr sz="3600" b="1" i="0">
+                <a:solidFill>
+                  <a:srgbClr val="FFFFFF"/>
                 </a:solidFill>
                 <a:latin typeface="Arial"/>
               </a:rPr>
-              <a:t/>
+              <a:t>E como num dilúvio, Sua misericórdia chove</a:t>
             </a:r>
           </a:p>
         </p:txBody>
@@ -5391,8 +5111,8 @@
         </p:nvSpPr>
         <p:spPr>
           <a:xfrm>
-            <a:off x="594360" y="3529584"/>
-            <a:ext cx="11002975" cy="685800"/>
+            <a:off x="640080" y="4128516"/>
+            <a:ext cx="10911535" cy="310896"/>
           </a:xfrm>
           <a:prstGeom prst="rect">
             <a:avLst/>
@@ -5407,13 +5127,13 @@
           <a:p>
             <a:pPr algn="ctr"/>
             <a:r>
-              <a:rPr sz="3352" b="1" i="0">
-                <a:solidFill>
-                  <a:srgbClr val="FFFFFF"/>
+              <a:rPr sz="2000" b="0" i="0">
+                <a:solidFill>
+                  <a:srgbClr val="828282"/>
                 </a:solidFill>
                 <a:latin typeface="Arial"/>
               </a:rPr>
-              <a:t>E como num dilúvio, Sua misericórdia chove</a:t>
+              <a:t>鎖 - は解かれて 　罪人が自由に</a:t>
             </a:r>
           </a:p>
         </p:txBody>
@@ -5426,8 +5146,8 @@
         </p:nvSpPr>
         <p:spPr>
           <a:xfrm>
-            <a:off x="594360" y="4251960"/>
-            <a:ext cx="11002975" cy="347472"/>
+            <a:off x="640080" y="4494276"/>
+            <a:ext cx="10911535" cy="310896"/>
           </a:xfrm>
           <a:prstGeom prst="rect">
             <a:avLst/>
@@ -5442,13 +5162,13 @@
           <a:p>
             <a:pPr algn="ctr"/>
             <a:r>
-              <a:rPr sz="2200" b="0" i="1">
-                <a:solidFill>
-                  <a:srgbClr val="8C8C8C"/>
+              <a:rPr sz="2000" b="0" i="0">
+                <a:solidFill>
+                  <a:srgbClr val="828282"/>
                 </a:solidFill>
                 <a:latin typeface="Arial"/>
               </a:rPr>
-              <a:t/>
+              <a:t>あわれ-み流れる  恵と   主の愛</a:t>
             </a:r>
           </a:p>
         </p:txBody>
@@ -5487,8 +5207,8 @@
         </p:nvSpPr>
         <p:spPr>
           <a:xfrm>
-            <a:off x="594360" y="2258568"/>
-            <a:ext cx="11002975" cy="685800"/>
+            <a:off x="640080" y="2052828"/>
+            <a:ext cx="10911535" cy="731520"/>
           </a:xfrm>
           <a:prstGeom prst="rect">
             <a:avLst/>
@@ -5503,7 +5223,7 @@
           <a:p>
             <a:pPr algn="ctr"/>
             <a:r>
-              <a:rPr sz="4400" b="1" i="0">
+              <a:rPr sz="4800" b="1" i="0">
                 <a:solidFill>
                   <a:srgbClr val="FFFFFF"/>
                 </a:solidFill>
@@ -5522,8 +5242,8 @@
         </p:nvSpPr>
         <p:spPr>
           <a:xfrm>
-            <a:off x="594360" y="2980944"/>
-            <a:ext cx="11002975" cy="347472"/>
+            <a:off x="640080" y="2985516"/>
+            <a:ext cx="10911535" cy="731520"/>
           </a:xfrm>
           <a:prstGeom prst="rect">
             <a:avLst/>
@@ -5538,83 +5258,13 @@
           <a:p>
             <a:pPr algn="ctr"/>
             <a:r>
-              <a:rPr sz="2200" b="0" i="1">
-                <a:solidFill>
-                  <a:srgbClr val="8C8C8C"/>
-                </a:solidFill>
-                <a:latin typeface="Arial"/>
-              </a:rPr>
-              <a:t/>
-            </a:r>
-          </a:p>
-        </p:txBody>
-      </p:sp>
-      <p:sp>
-        <p:nvSpPr>
-          <p:cNvPr id="4" name="TextBox 3"/>
-          <p:cNvSpPr txBox="1"/>
-          <p:nvPr/>
-        </p:nvSpPr>
-        <p:spPr>
-          <a:xfrm>
-            <a:off x="594360" y="3529584"/>
-            <a:ext cx="11002975" cy="685800"/>
-          </a:xfrm>
-          <a:prstGeom prst="rect">
-            <a:avLst/>
-          </a:prstGeom>
-          <a:noFill/>
-        </p:spPr>
-        <p:txBody>
-          <a:bodyPr wrap="square">
-            <a:spAutoFit/>
-          </a:bodyPr>
-          <a:lstStyle/>
-          <a:p>
-            <a:pPr algn="ctr"/>
-            <a:r>
-              <a:rPr sz="3911" b="1" i="0">
+              <a:rPr sz="4200" b="1" i="0">
                 <a:solidFill>
                   <a:srgbClr val="FFFFFF"/>
                 </a:solidFill>
                 <a:latin typeface="Arial"/>
               </a:rPr>
               <a:t>Sua palavra assegura minha esperança</a:t>
-            </a:r>
-          </a:p>
-        </p:txBody>
-      </p:sp>
-      <p:sp>
-        <p:nvSpPr>
-          <p:cNvPr id="5" name="TextBox 4"/>
-          <p:cNvSpPr txBox="1"/>
-          <p:nvPr/>
-        </p:nvSpPr>
-        <p:spPr>
-          <a:xfrm>
-            <a:off x="594360" y="4251960"/>
-            <a:ext cx="11002975" cy="347472"/>
-          </a:xfrm>
-          <a:prstGeom prst="rect">
-            <a:avLst/>
-          </a:prstGeom>
-          <a:noFill/>
-        </p:spPr>
-        <p:txBody>
-          <a:bodyPr wrap="square">
-            <a:spAutoFit/>
-          </a:bodyPr>
-          <a:lstStyle/>
-          <a:p>
-            <a:pPr algn="ctr"/>
-            <a:r>
-              <a:rPr sz="2200" b="0" i="1">
-                <a:solidFill>
-                  <a:srgbClr val="8C8C8C"/>
-                </a:solidFill>
-                <a:latin typeface="Arial"/>
-              </a:rPr>
-              <a:t/>
             </a:r>
           </a:p>
         </p:txBody>
@@ -5653,8 +5303,8 @@
         </p:nvSpPr>
         <p:spPr>
           <a:xfrm>
-            <a:off x="594360" y="2258568"/>
-            <a:ext cx="11002975" cy="685800"/>
+            <a:off x="640080" y="2052828"/>
+            <a:ext cx="10911535" cy="731520"/>
           </a:xfrm>
           <a:prstGeom prst="rect">
             <a:avLst/>
@@ -5669,7 +5319,7 @@
           <a:p>
             <a:pPr algn="ctr"/>
             <a:r>
-              <a:rPr sz="4400" b="1" i="0">
+              <a:rPr sz="4800" b="1" i="0">
                 <a:solidFill>
                   <a:srgbClr val="FFFFFF"/>
                 </a:solidFill>
@@ -5688,8 +5338,8 @@
         </p:nvSpPr>
         <p:spPr>
           <a:xfrm>
-            <a:off x="594360" y="2980944"/>
-            <a:ext cx="11002975" cy="347472"/>
+            <a:off x="640080" y="2985516"/>
+            <a:ext cx="10911535" cy="731520"/>
           </a:xfrm>
           <a:prstGeom prst="rect">
             <a:avLst/>
@@ -5704,83 +5354,13 @@
           <a:p>
             <a:pPr algn="ctr"/>
             <a:r>
-              <a:rPr sz="2200" b="0" i="1">
-                <a:solidFill>
-                  <a:srgbClr val="8C8C8C"/>
-                </a:solidFill>
-                <a:latin typeface="Arial"/>
-              </a:rPr>
-              <a:t/>
-            </a:r>
-          </a:p>
-        </p:txBody>
-      </p:sp>
-      <p:sp>
-        <p:nvSpPr>
-          <p:cNvPr id="4" name="TextBox 3"/>
-          <p:cNvSpPr txBox="1"/>
-          <p:nvPr/>
-        </p:nvSpPr>
-        <p:spPr>
-          <a:xfrm>
-            <a:off x="594360" y="3529584"/>
-            <a:ext cx="11002975" cy="685800"/>
-          </a:xfrm>
-          <a:prstGeom prst="rect">
-            <a:avLst/>
-          </a:prstGeom>
-          <a:noFill/>
-        </p:spPr>
-        <p:txBody>
-          <a:bodyPr wrap="square">
-            <a:spAutoFit/>
-          </a:bodyPr>
-          <a:lstStyle/>
-          <a:p>
-            <a:pPr algn="ctr"/>
-            <a:r>
-              <a:rPr sz="4400" b="1" i="0">
+              <a:rPr sz="4800" b="1" i="0">
                 <a:solidFill>
                   <a:srgbClr val="FFFFFF"/>
                 </a:solidFill>
                 <a:latin typeface="Arial"/>
               </a:rPr>
               <a:t>Enquanto a vida durar</a:t>
-            </a:r>
-          </a:p>
-        </p:txBody>
-      </p:sp>
-      <p:sp>
-        <p:nvSpPr>
-          <p:cNvPr id="5" name="TextBox 4"/>
-          <p:cNvSpPr txBox="1"/>
-          <p:nvPr/>
-        </p:nvSpPr>
-        <p:spPr>
-          <a:xfrm>
-            <a:off x="594360" y="4251960"/>
-            <a:ext cx="11002975" cy="347472"/>
-          </a:xfrm>
-          <a:prstGeom prst="rect">
-            <a:avLst/>
-          </a:prstGeom>
-          <a:noFill/>
-        </p:spPr>
-        <p:txBody>
-          <a:bodyPr wrap="square">
-            <a:spAutoFit/>
-          </a:bodyPr>
-          <a:lstStyle/>
-          <a:p>
-            <a:pPr algn="ctr"/>
-            <a:r>
-              <a:rPr sz="2200" b="0" i="1">
-                <a:solidFill>
-                  <a:srgbClr val="8C8C8C"/>
-                </a:solidFill>
-                <a:latin typeface="Arial"/>
-              </a:rPr>
-              <a:t/>
             </a:r>
           </a:p>
         </p:txBody>
@@ -5819,8 +5399,8 @@
         </p:nvSpPr>
         <p:spPr>
           <a:xfrm>
-            <a:off x="594360" y="1837944"/>
-            <a:ext cx="11002975" cy="685800"/>
+            <a:off x="640080" y="1650492"/>
+            <a:ext cx="10911535" cy="731520"/>
           </a:xfrm>
           <a:prstGeom prst="rect">
             <a:avLst/>
@@ -5835,7 +5415,7 @@
           <a:p>
             <a:pPr algn="ctr"/>
             <a:r>
-              <a:rPr sz="4400" b="1" i="0">
+              <a:rPr sz="4800" b="1" i="0">
                 <a:solidFill>
                   <a:srgbClr val="FFFFFF"/>
                 </a:solidFill>
@@ -5854,8 +5434,8 @@
         </p:nvSpPr>
         <p:spPr>
           <a:xfrm>
-            <a:off x="594360" y="2560320"/>
-            <a:ext cx="11002975" cy="384048"/>
+            <a:off x="640080" y="2418588"/>
+            <a:ext cx="10911535" cy="365760"/>
           </a:xfrm>
           <a:prstGeom prst="rect">
             <a:avLst/>
@@ -5872,7 +5452,7 @@
             <a:r>
               <a:rPr sz="2400" b="0" i="1">
                 <a:solidFill>
-                  <a:srgbClr val="B4B4B4"/>
+                  <a:srgbClr val="AAAAAA"/>
                 </a:solidFill>
                 <a:latin typeface="Arial"/>
               </a:rPr>
@@ -5889,8 +5469,8 @@
         </p:nvSpPr>
         <p:spPr>
           <a:xfrm>
-            <a:off x="594360" y="2980944"/>
-            <a:ext cx="11002975" cy="347472"/>
+            <a:off x="640080" y="2985516"/>
+            <a:ext cx="10911535" cy="731520"/>
           </a:xfrm>
           <a:prstGeom prst="rect">
             <a:avLst/>
@@ -5905,13 +5485,13 @@
           <a:p>
             <a:pPr algn="ctr"/>
             <a:r>
-              <a:rPr sz="2000" b="0" i="1">
-                <a:solidFill>
-                  <a:srgbClr val="8C8C8C"/>
+              <a:rPr sz="4800" b="1" i="0">
+                <a:solidFill>
+                  <a:srgbClr val="FFFFFF"/>
                 </a:solidFill>
                 <a:latin typeface="Arial"/>
               </a:rPr>
-              <a:t/>
+              <a:t>この身のけがれを 知れるわれに</a:t>
             </a:r>
           </a:p>
         </p:txBody>
@@ -5924,8 +5504,8 @@
         </p:nvSpPr>
         <p:spPr>
           <a:xfrm>
-            <a:off x="594360" y="3529584"/>
-            <a:ext cx="11002975" cy="685800"/>
+            <a:off x="640080" y="3753612"/>
+            <a:ext cx="10911535" cy="365760"/>
           </a:xfrm>
           <a:prstGeom prst="rect">
             <a:avLst/>
@@ -5940,13 +5520,13 @@
           <a:p>
             <a:pPr algn="ctr"/>
             <a:r>
-              <a:rPr sz="4400" b="1" i="0">
-                <a:solidFill>
-                  <a:srgbClr val="FFFFFF"/>
+              <a:rPr sz="2400" b="0" i="1">
+                <a:solidFill>
+                  <a:srgbClr val="AAAAAA"/>
                 </a:solidFill>
                 <a:latin typeface="Arial"/>
               </a:rPr>
-              <a:t>この身のけがれを 知れるわれに</a:t>
+              <a:t>kono mi no kegare wo shireru ware ni</a:t>
             </a:r>
           </a:p>
         </p:txBody>
@@ -5959,8 +5539,8 @@
         </p:nvSpPr>
         <p:spPr>
           <a:xfrm>
-            <a:off x="594360" y="4251960"/>
-            <a:ext cx="11002975" cy="384048"/>
+            <a:off x="640080" y="4530852"/>
+            <a:ext cx="10911535" cy="310896"/>
           </a:xfrm>
           <a:prstGeom prst="rect">
             <a:avLst/>
@@ -5975,13 +5555,13 @@
           <a:p>
             <a:pPr algn="ctr"/>
             <a:r>
-              <a:rPr sz="2400" b="0" i="1">
-                <a:solidFill>
-                  <a:srgbClr val="B4B4B4"/>
+              <a:rPr sz="2000" b="0" i="1">
+                <a:solidFill>
+                  <a:srgbClr val="828282"/>
                 </a:solidFill>
                 <a:latin typeface="Arial"/>
               </a:rPr>
-              <a:t>kono mi no kegare wo shireru ware ni</a:t>
+              <a:t>Maravilhosa Graça</a:t>
             </a:r>
           </a:p>
         </p:txBody>
@@ -5994,8 +5574,8 @@
         </p:nvSpPr>
         <p:spPr>
           <a:xfrm>
-            <a:off x="594360" y="4672584"/>
-            <a:ext cx="11002975" cy="347472"/>
+            <a:off x="640080" y="4896612"/>
+            <a:ext cx="10911535" cy="310896"/>
           </a:xfrm>
           <a:prstGeom prst="rect">
             <a:avLst/>
@@ -6012,11 +5592,11 @@
             <a:r>
               <a:rPr sz="2000" b="0" i="1">
                 <a:solidFill>
-                  <a:srgbClr val="8C8C8C"/>
+                  <a:srgbClr val="828282"/>
                 </a:solidFill>
                 <a:latin typeface="Arial"/>
               </a:rPr>
-              <a:t/>
+              <a:t>Maravilhosa graça, quão doce é o som</a:t>
             </a:r>
           </a:p>
         </p:txBody>

--- a/output_pptx/Amazing_Grace_My_Chains_Are_Gone.pptx
+++ b/output_pptx/Amazing_Grace_My_Chains_Are_Gone.pptx
@@ -4387,6 +4387,76 @@
           </a:p>
         </p:txBody>
       </p:sp>
+      <p:sp>
+        <p:nvSpPr>
+          <p:cNvPr id="4" name="TextBox 3"/>
+          <p:cNvSpPr txBox="1"/>
+          <p:nvPr/>
+        </p:nvSpPr>
+        <p:spPr>
+          <a:xfrm>
+            <a:off x="640080" y="4128516"/>
+            <a:ext cx="10911535" cy="310896"/>
+          </a:xfrm>
+          <a:prstGeom prst="rect">
+            <a:avLst/>
+          </a:prstGeom>
+          <a:noFill/>
+        </p:spPr>
+        <p:txBody>
+          <a:bodyPr wrap="square">
+            <a:spAutoFit/>
+          </a:bodyPr>
+          <a:lstStyle/>
+          <a:p>
+            <a:pPr algn="ctr"/>
+            <a:r>
+              <a:rPr sz="2000" b="0" i="0">
+                <a:solidFill>
+                  <a:srgbClr val="828282"/>
+                </a:solidFill>
+                <a:latin typeface="Arial"/>
+              </a:rPr>
+              <a:t>主は私に良いことを約束された</a:t>
+            </a:r>
+          </a:p>
+        </p:txBody>
+      </p:sp>
+      <p:sp>
+        <p:nvSpPr>
+          <p:cNvPr id="5" name="TextBox 4"/>
+          <p:cNvSpPr txBox="1"/>
+          <p:nvPr/>
+        </p:nvSpPr>
+        <p:spPr>
+          <a:xfrm>
+            <a:off x="640080" y="4494276"/>
+            <a:ext cx="10911535" cy="310896"/>
+          </a:xfrm>
+          <a:prstGeom prst="rect">
+            <a:avLst/>
+          </a:prstGeom>
+          <a:noFill/>
+        </p:spPr>
+        <p:txBody>
+          <a:bodyPr wrap="square">
+            <a:spAutoFit/>
+          </a:bodyPr>
+          <a:lstStyle/>
+          <a:p>
+            <a:pPr algn="ctr"/>
+            <a:r>
+              <a:rPr sz="2000" b="0" i="0">
+                <a:solidFill>
+                  <a:srgbClr val="828282"/>
+                </a:solidFill>
+                <a:latin typeface="Arial"/>
+              </a:rPr>
+              <a:t>御言葉は私の希望を確かにする</a:t>
+            </a:r>
+          </a:p>
+        </p:txBody>
+      </p:sp>
     </p:spTree>
   </p:cSld>
   <p:clrMapOvr>
@@ -4483,6 +4553,76 @@
           </a:p>
         </p:txBody>
       </p:sp>
+      <p:sp>
+        <p:nvSpPr>
+          <p:cNvPr id="4" name="TextBox 3"/>
+          <p:cNvSpPr txBox="1"/>
+          <p:nvPr/>
+        </p:nvSpPr>
+        <p:spPr>
+          <a:xfrm>
+            <a:off x="640080" y="4128516"/>
+            <a:ext cx="10911535" cy="310896"/>
+          </a:xfrm>
+          <a:prstGeom prst="rect">
+            <a:avLst/>
+          </a:prstGeom>
+          <a:noFill/>
+        </p:spPr>
+        <p:txBody>
+          <a:bodyPr wrap="square">
+            <a:spAutoFit/>
+          </a:bodyPr>
+          <a:lstStyle/>
+          <a:p>
+            <a:pPr algn="ctr"/>
+            <a:r>
+              <a:rPr sz="2000" b="0" i="0">
+                <a:solidFill>
+                  <a:srgbClr val="828282"/>
+                </a:solidFill>
+                <a:latin typeface="Arial"/>
+              </a:rPr>
+              <a:t>彼は私の盾と守り手となるだろう</a:t>
+            </a:r>
+          </a:p>
+        </p:txBody>
+      </p:sp>
+      <p:sp>
+        <p:nvSpPr>
+          <p:cNvPr id="5" name="TextBox 4"/>
+          <p:cNvSpPr txBox="1"/>
+          <p:nvPr/>
+        </p:nvSpPr>
+        <p:spPr>
+          <a:xfrm>
+            <a:off x="640080" y="4494276"/>
+            <a:ext cx="10911535" cy="310896"/>
+          </a:xfrm>
+          <a:prstGeom prst="rect">
+            <a:avLst/>
+          </a:prstGeom>
+          <a:noFill/>
+        </p:spPr>
+        <p:txBody>
+          <a:bodyPr wrap="square">
+            <a:spAutoFit/>
+          </a:bodyPr>
+          <a:lstStyle/>
+          <a:p>
+            <a:pPr algn="ctr"/>
+            <a:r>
+              <a:rPr sz="2000" b="0" i="0">
+                <a:solidFill>
+                  <a:srgbClr val="828282"/>
+                </a:solidFill>
+                <a:latin typeface="Arial"/>
+              </a:rPr>
+              <a:t>人生が続く限り</a:t>
+            </a:r>
+          </a:p>
+        </p:txBody>
+      </p:sp>
     </p:spTree>
   </p:cSld>
   <p:clrMapOvr>
@@ -4579,6 +4719,76 @@
           </a:p>
         </p:txBody>
       </p:sp>
+      <p:sp>
+        <p:nvSpPr>
+          <p:cNvPr id="4" name="TextBox 3"/>
+          <p:cNvSpPr txBox="1"/>
+          <p:nvPr/>
+        </p:nvSpPr>
+        <p:spPr>
+          <a:xfrm>
+            <a:off x="640080" y="4128516"/>
+            <a:ext cx="10911535" cy="310896"/>
+          </a:xfrm>
+          <a:prstGeom prst="rect">
+            <a:avLst/>
+          </a:prstGeom>
+          <a:noFill/>
+        </p:spPr>
+        <p:txBody>
+          <a:bodyPr wrap="square">
+            <a:spAutoFit/>
+          </a:bodyPr>
+          <a:lstStyle/>
+          <a:p>
+            <a:pPr algn="ctr"/>
+            <a:r>
+              <a:rPr sz="2000" b="0" i="0">
+                <a:solidFill>
+                  <a:srgbClr val="828282"/>
+                </a:solidFill>
+                <a:latin typeface="Arial"/>
+              </a:rPr>
+              <a:t>私のような惨めな者を救った</a:t>
+            </a:r>
+          </a:p>
+        </p:txBody>
+      </p:sp>
+      <p:sp>
+        <p:nvSpPr>
+          <p:cNvPr id="5" name="TextBox 4"/>
+          <p:cNvSpPr txBox="1"/>
+          <p:nvPr/>
+        </p:nvSpPr>
+        <p:spPr>
+          <a:xfrm>
+            <a:off x="640080" y="4494276"/>
+            <a:ext cx="10911535" cy="310896"/>
+          </a:xfrm>
+          <a:prstGeom prst="rect">
+            <a:avLst/>
+          </a:prstGeom>
+          <a:noFill/>
+        </p:spPr>
+        <p:txBody>
+          <a:bodyPr wrap="square">
+            <a:spAutoFit/>
+          </a:bodyPr>
+          <a:lstStyle/>
+          <a:p>
+            <a:pPr algn="ctr"/>
+            <a:r>
+              <a:rPr sz="2000" b="0" i="0">
+                <a:solidFill>
+                  <a:srgbClr val="828282"/>
+                </a:solidFill>
+                <a:latin typeface="Arial"/>
+              </a:rPr>
+              <a:t>私は迷っていたが、今は見つけられた</a:t>
+            </a:r>
+          </a:p>
+        </p:txBody>
+      </p:sp>
     </p:spTree>
   </p:cSld>
   <p:clrMapOvr>
@@ -4841,6 +5051,76 @@
           </a:p>
         </p:txBody>
       </p:sp>
+      <p:sp>
+        <p:nvSpPr>
+          <p:cNvPr id="4" name="TextBox 3"/>
+          <p:cNvSpPr txBox="1"/>
+          <p:nvPr/>
+        </p:nvSpPr>
+        <p:spPr>
+          <a:xfrm>
+            <a:off x="640080" y="4128516"/>
+            <a:ext cx="10911535" cy="310896"/>
+          </a:xfrm>
+          <a:prstGeom prst="rect">
+            <a:avLst/>
+          </a:prstGeom>
+          <a:noFill/>
+        </p:spPr>
+        <p:txBody>
+          <a:bodyPr wrap="square">
+            <a:spAutoFit/>
+          </a:bodyPr>
+          <a:lstStyle/>
+          <a:p>
+            <a:pPr algn="ctr"/>
+            <a:r>
+              <a:rPr sz="2000" b="0" i="0">
+                <a:solidFill>
+                  <a:srgbClr val="828282"/>
+                </a:solidFill>
+                <a:latin typeface="Arial"/>
+              </a:rPr>
+              <a:t>そして恵みが私の恐れを和らげた</a:t>
+            </a:r>
+          </a:p>
+        </p:txBody>
+      </p:sp>
+      <p:sp>
+        <p:nvSpPr>
+          <p:cNvPr id="5" name="TextBox 4"/>
+          <p:cNvSpPr txBox="1"/>
+          <p:nvPr/>
+        </p:nvSpPr>
+        <p:spPr>
+          <a:xfrm>
+            <a:off x="640080" y="4494276"/>
+            <a:ext cx="10911535" cy="310896"/>
+          </a:xfrm>
+          <a:prstGeom prst="rect">
+            <a:avLst/>
+          </a:prstGeom>
+          <a:noFill/>
+        </p:spPr>
+        <p:txBody>
+          <a:bodyPr wrap="square">
+            <a:spAutoFit/>
+          </a:bodyPr>
+          <a:lstStyle/>
+          <a:p>
+            <a:pPr algn="ctr"/>
+            <a:r>
+              <a:rPr sz="2000" b="0" i="0">
+                <a:solidFill>
+                  <a:srgbClr val="828282"/>
+                </a:solidFill>
+                <a:latin typeface="Arial"/>
+              </a:rPr>
+              <a:t>何と貴い恵みの現れだろう</a:t>
+            </a:r>
+          </a:p>
+        </p:txBody>
+      </p:sp>
     </p:spTree>
   </p:cSld>
   <p:clrMapOvr>
@@ -5269,6 +5549,76 @@
           </a:p>
         </p:txBody>
       </p:sp>
+      <p:sp>
+        <p:nvSpPr>
+          <p:cNvPr id="4" name="TextBox 3"/>
+          <p:cNvSpPr txBox="1"/>
+          <p:nvPr/>
+        </p:nvSpPr>
+        <p:spPr>
+          <a:xfrm>
+            <a:off x="640080" y="4128516"/>
+            <a:ext cx="10911535" cy="310896"/>
+          </a:xfrm>
+          <a:prstGeom prst="rect">
+            <a:avLst/>
+          </a:prstGeom>
+          <a:noFill/>
+        </p:spPr>
+        <p:txBody>
+          <a:bodyPr wrap="square">
+            <a:spAutoFit/>
+          </a:bodyPr>
+          <a:lstStyle/>
+          <a:p>
+            <a:pPr algn="ctr"/>
+            <a:r>
+              <a:rPr sz="2000" b="0" i="0">
+                <a:solidFill>
+                  <a:srgbClr val="828282"/>
+                </a:solidFill>
+                <a:latin typeface="Arial"/>
+              </a:rPr>
+              <a:t>主は私に良いことを約束された</a:t>
+            </a:r>
+          </a:p>
+        </p:txBody>
+      </p:sp>
+      <p:sp>
+        <p:nvSpPr>
+          <p:cNvPr id="5" name="TextBox 4"/>
+          <p:cNvSpPr txBox="1"/>
+          <p:nvPr/>
+        </p:nvSpPr>
+        <p:spPr>
+          <a:xfrm>
+            <a:off x="640080" y="4494276"/>
+            <a:ext cx="10911535" cy="310896"/>
+          </a:xfrm>
+          <a:prstGeom prst="rect">
+            <a:avLst/>
+          </a:prstGeom>
+          <a:noFill/>
+        </p:spPr>
+        <p:txBody>
+          <a:bodyPr wrap="square">
+            <a:spAutoFit/>
+          </a:bodyPr>
+          <a:lstStyle/>
+          <a:p>
+            <a:pPr algn="ctr"/>
+            <a:r>
+              <a:rPr sz="2000" b="0" i="0">
+                <a:solidFill>
+                  <a:srgbClr val="828282"/>
+                </a:solidFill>
+                <a:latin typeface="Arial"/>
+              </a:rPr>
+              <a:t>御言葉は私の希望を確かにする</a:t>
+            </a:r>
+          </a:p>
+        </p:txBody>
+      </p:sp>
     </p:spTree>
   </p:cSld>
   <p:clrMapOvr>
@@ -5361,6 +5711,76 @@
                 <a:latin typeface="Arial"/>
               </a:rPr>
               <a:t>Enquanto a vida durar</a:t>
+            </a:r>
+          </a:p>
+        </p:txBody>
+      </p:sp>
+      <p:sp>
+        <p:nvSpPr>
+          <p:cNvPr id="4" name="TextBox 3"/>
+          <p:cNvSpPr txBox="1"/>
+          <p:nvPr/>
+        </p:nvSpPr>
+        <p:spPr>
+          <a:xfrm>
+            <a:off x="640080" y="4128516"/>
+            <a:ext cx="10911535" cy="310896"/>
+          </a:xfrm>
+          <a:prstGeom prst="rect">
+            <a:avLst/>
+          </a:prstGeom>
+          <a:noFill/>
+        </p:spPr>
+        <p:txBody>
+          <a:bodyPr wrap="square">
+            <a:spAutoFit/>
+          </a:bodyPr>
+          <a:lstStyle/>
+          <a:p>
+            <a:pPr algn="ctr"/>
+            <a:r>
+              <a:rPr sz="2000" b="0" i="0">
+                <a:solidFill>
+                  <a:srgbClr val="828282"/>
+                </a:solidFill>
+                <a:latin typeface="Arial"/>
+              </a:rPr>
+              <a:t>彼は私の盾と守り手となるだろう</a:t>
+            </a:r>
+          </a:p>
+        </p:txBody>
+      </p:sp>
+      <p:sp>
+        <p:nvSpPr>
+          <p:cNvPr id="5" name="TextBox 4"/>
+          <p:cNvSpPr txBox="1"/>
+          <p:nvPr/>
+        </p:nvSpPr>
+        <p:spPr>
+          <a:xfrm>
+            <a:off x="640080" y="4494276"/>
+            <a:ext cx="10911535" cy="310896"/>
+          </a:xfrm>
+          <a:prstGeom prst="rect">
+            <a:avLst/>
+          </a:prstGeom>
+          <a:noFill/>
+        </p:spPr>
+        <p:txBody>
+          <a:bodyPr wrap="square">
+            <a:spAutoFit/>
+          </a:bodyPr>
+          <a:lstStyle/>
+          <a:p>
+            <a:pPr algn="ctr"/>
+            <a:r>
+              <a:rPr sz="2000" b="0" i="0">
+                <a:solidFill>
+                  <a:srgbClr val="828282"/>
+                </a:solidFill>
+                <a:latin typeface="Arial"/>
+              </a:rPr>
+              <a:t>人生が続く限り</a:t>
             </a:r>
           </a:p>
         </p:txBody>
